--- a/src/PPT_Laporan.pptx
+++ b/src/PPT_Laporan.pptx
@@ -2541,7 +2541,7 @@
                 <a:ea typeface="Calibri" pitchFamily="34" charset="-122"/>
                 <a:cs typeface="Calibri" pitchFamily="34" charset="-120"/>
               </a:rPr>
-              <a:t> Pendidikan </a:t>
+              <a:t> Kita </a:t>
             </a:r>
             <a:r>
               <a:rPr lang="en-US" sz="1200" b="1" dirty="0" err="1">
@@ -2552,7 +2552,7 @@
                 <a:ea typeface="Calibri" pitchFamily="34" charset="-122"/>
                 <a:cs typeface="Calibri" pitchFamily="34" charset="-120"/>
               </a:rPr>
-              <a:t>Karakter</a:t>
+              <a:t>memilih</a:t>
             </a:r>
             <a:r>
               <a:rPr lang="en-US" sz="1200" b="1" dirty="0">
@@ -2563,7 +2563,51 @@
                 <a:ea typeface="Calibri" pitchFamily="34" charset="-122"/>
                 <a:cs typeface="Calibri" pitchFamily="34" charset="-120"/>
               </a:rPr>
-              <a:t> Islami Penting?</a:t>
+              <a:t> </a:t>
+            </a:r>
+            <a:r>
+              <a:rPr lang="en-US" sz="1200" b="1" dirty="0" err="1">
+                <a:solidFill>
+                  <a:schemeClr val="bg1"/>
+                </a:solidFill>
+                <a:latin typeface="Calibri" pitchFamily="34" charset="0"/>
+                <a:ea typeface="Calibri" pitchFamily="34" charset="-122"/>
+                <a:cs typeface="Calibri" pitchFamily="34" charset="-120"/>
+              </a:rPr>
+              <a:t>materi</a:t>
+            </a:r>
+            <a:r>
+              <a:rPr lang="en-US" sz="1200" b="1" dirty="0">
+                <a:solidFill>
+                  <a:schemeClr val="bg1"/>
+                </a:solidFill>
+                <a:latin typeface="Calibri" pitchFamily="34" charset="0"/>
+                <a:ea typeface="Calibri" pitchFamily="34" charset="-122"/>
+                <a:cs typeface="Calibri" pitchFamily="34" charset="-120"/>
+              </a:rPr>
+              <a:t> </a:t>
+            </a:r>
+            <a:r>
+              <a:rPr lang="en-US" sz="1200" b="1" dirty="0" err="1">
+                <a:solidFill>
+                  <a:schemeClr val="bg1"/>
+                </a:solidFill>
+                <a:latin typeface="Calibri" pitchFamily="34" charset="0"/>
+                <a:ea typeface="Calibri" pitchFamily="34" charset="-122"/>
+                <a:cs typeface="Calibri" pitchFamily="34" charset="-120"/>
+              </a:rPr>
+              <a:t>ini</a:t>
+            </a:r>
+            <a:r>
+              <a:rPr lang="en-US" sz="1200" b="1" dirty="0">
+                <a:solidFill>
+                  <a:schemeClr val="bg1"/>
+                </a:solidFill>
+                <a:latin typeface="Calibri" pitchFamily="34" charset="0"/>
+                <a:ea typeface="Calibri" pitchFamily="34" charset="-122"/>
+                <a:cs typeface="Calibri" pitchFamily="34" charset="-120"/>
+              </a:rPr>
+              <a:t>?</a:t>
             </a:r>
             <a:endParaRPr lang="en-US" sz="1200" dirty="0">
               <a:solidFill>
@@ -2593,7 +2637,7 @@
                 <a:ea typeface="Calibri" pitchFamily="34" charset="-122"/>
                 <a:cs typeface="Calibri" pitchFamily="34" charset="-120"/>
               </a:rPr>
-              <a:t>Di era </a:t>
+              <a:t>Karena Di era </a:t>
             </a:r>
             <a:r>
               <a:rPr lang="en-US" sz="1200" dirty="0" err="1">
@@ -3974,13 +4018,13 @@
   <p:clrMapOvr>
     <a:masterClrMapping/>
   </p:clrMapOvr>
-  <mc:AlternateContent xmlns:mc="http://schemas.openxmlformats.org/markup-compatibility/2006">
-    <mc:Choice xmlns:p14="http://schemas.microsoft.com/office/powerpoint/2010/main" Requires="p14">
+  <mc:AlternateContent xmlns:mc="http://schemas.openxmlformats.org/markup-compatibility/2006" xmlns:p14="http://schemas.microsoft.com/office/powerpoint/2010/main">
+    <mc:Choice Requires="p14">
       <p:transition spd="slow" p14:dur="1300">
         <p14:pan dir="u"/>
       </p:transition>
     </mc:Choice>
-    <mc:Fallback>
+    <mc:Fallback xmlns="">
       <p:transition spd="slow">
         <p:fade/>
       </p:transition>
@@ -8098,13 +8142,13 @@
   <p:clrMapOvr>
     <a:masterClrMapping/>
   </p:clrMapOvr>
-  <mc:AlternateContent xmlns:mc="http://schemas.openxmlformats.org/markup-compatibility/2006">
-    <mc:Choice xmlns:p14="http://schemas.microsoft.com/office/powerpoint/2010/main" Requires="p14">
+  <mc:AlternateContent xmlns:mc="http://schemas.openxmlformats.org/markup-compatibility/2006" xmlns:p14="http://schemas.microsoft.com/office/powerpoint/2010/main">
+    <mc:Choice Requires="p14">
       <p:transition spd="slow" p14:dur="1300">
         <p14:pan dir="u"/>
       </p:transition>
     </mc:Choice>
-    <mc:Fallback>
+    <mc:Fallback xmlns="">
       <p:transition spd="slow">
         <p:fade/>
       </p:transition>
